--- a/Sang Nguyễn Thanh - CS2205.JAN2026.DeCuong.FinalReport.Slide.pptx
+++ b/Sang Nguyễn Thanh - CS2205.JAN2026.DeCuong.FinalReport.Slide.pptx
@@ -16,16 +16,18 @@
     <p:sldId id="261" r:id="rId10"/>
     <p:sldId id="262" r:id="rId11"/>
     <p:sldId id="263" r:id="rId12"/>
+    <p:sldId id="264" r:id="rId13"/>
+    <p:sldId id="265" r:id="rId14"/>
   </p:sldIdLst>
   <p:sldSz cy="5143500" cx="9144000"/>
   <p:notesSz cx="6858000" cy="9144000"/>
   <p:embeddedFontLst>
     <p:embeddedFont>
       <p:font typeface="Roboto"/>
-      <p:regular r:id="rId13"/>
-      <p:bold r:id="rId14"/>
-      <p:italic r:id="rId15"/>
-      <p:boldItalic r:id="rId16"/>
+      <p:regular r:id="rId15"/>
+      <p:bold r:id="rId16"/>
+      <p:italic r:id="rId17"/>
+      <p:boldItalic r:id="rId18"/>
     </p:embeddedFont>
   </p:embeddedFontLst>
   <p:defaultTextStyle>
@@ -785,6 +787,105 @@
 </p:notes>
 </file>
 
+<file path=ppt/notesSlides/notesSlide10.xml><?xml version="1.0" encoding="utf-8"?>
+<p:notes xmlns:a="http://schemas.openxmlformats.org/drawingml/2006/main" xmlns:r="http://schemas.openxmlformats.org/officeDocument/2006/relationships" xmlns:mc="http://schemas.openxmlformats.org/markup-compatibility/2006" xmlns:mv="urn:schemas-microsoft-com:mac:vml" xmlns:p="http://schemas.openxmlformats.org/presentationml/2006/main" xmlns:c="http://schemas.openxmlformats.org/drawingml/2006/chart" xmlns:dgm="http://schemas.openxmlformats.org/drawingml/2006/diagram" xmlns:o="urn:schemas-microsoft-com:office:office" xmlns:v="urn:schemas-microsoft-com:vml" xmlns:pvml="urn:schemas-microsoft-com:office:powerpoint" xmlns:com="http://schemas.openxmlformats.org/drawingml/2006/compatibility" xmlns:p14="http://schemas.microsoft.com/office/powerpoint/2010/main" xmlns:p15="http://schemas.microsoft.com/office/powerpoint/2012/main" xmlns:ahyp="http://schemas.microsoft.com/office/drawing/2018/hyperlinkcolor" showMasterPhAnim="0" showMasterSp="0">
+  <p:cSld>
+    <p:spTree>
+      <p:nvGrpSpPr>
+        <p:cNvPr id="120" name="Shape 120"/>
+        <p:cNvGrpSpPr/>
+        <p:nvPr/>
+      </p:nvGrpSpPr>
+      <p:grpSpPr>
+        <a:xfrm>
+          <a:off x="0" y="0"/>
+          <a:ext cx="0" cy="0"/>
+          <a:chOff x="0" y="0"/>
+          <a:chExt cx="0" cy="0"/>
+        </a:xfrm>
+      </p:grpSpPr>
+      <p:sp>
+        <p:nvSpPr>
+          <p:cNvPr id="121" name="Google Shape;121;g10d8a3913ea_0_139:notes"/>
+          <p:cNvSpPr/>
+          <p:nvPr>
+            <p:ph idx="2" type="sldImg"/>
+          </p:nvPr>
+        </p:nvSpPr>
+        <p:spPr>
+          <a:xfrm>
+            <a:off x="381175" y="685800"/>
+            <a:ext cx="6096300" cy="3429000"/>
+          </a:xfrm>
+          <a:custGeom>
+            <a:rect b="b" l="l" r="r" t="t"/>
+            <a:pathLst>
+              <a:path extrusionOk="0" h="120000" w="120000">
+                <a:moveTo>
+                  <a:pt x="0" y="0"/>
+                </a:moveTo>
+                <a:lnTo>
+                  <a:pt x="120000" y="0"/>
+                </a:lnTo>
+                <a:lnTo>
+                  <a:pt x="120000" y="120000"/>
+                </a:lnTo>
+                <a:lnTo>
+                  <a:pt x="0" y="120000"/>
+                </a:lnTo>
+                <a:close/>
+              </a:path>
+            </a:pathLst>
+          </a:custGeom>
+        </p:spPr>
+      </p:sp>
+      <p:sp>
+        <p:nvSpPr>
+          <p:cNvPr id="122" name="Google Shape;122;g10d8a3913ea_0_139:notes"/>
+          <p:cNvSpPr txBox="1"/>
+          <p:nvPr>
+            <p:ph idx="1" type="body"/>
+          </p:nvPr>
+        </p:nvSpPr>
+        <p:spPr>
+          <a:xfrm>
+            <a:off x="685800" y="4343400"/>
+            <a:ext cx="5486400" cy="4114800"/>
+          </a:xfrm>
+          <a:prstGeom prst="rect">
+            <a:avLst/>
+          </a:prstGeom>
+        </p:spPr>
+        <p:txBody>
+          <a:bodyPr anchorCtr="0" anchor="t" bIns="91425" lIns="91425" spcFirstLastPara="1" rIns="91425" wrap="square" tIns="91425">
+            <a:noAutofit/>
+          </a:bodyPr>
+          <a:lstStyle/>
+          <a:p>
+            <a:pPr indent="0" lvl="0" marL="0" rtl="0" algn="l">
+              <a:spcBef>
+                <a:spcPts val="0"/>
+              </a:spcBef>
+              <a:spcAft>
+                <a:spcPts val="0"/>
+              </a:spcAft>
+              <a:buNone/>
+            </a:pPr>
+            <a:r>
+              <a:t/>
+            </a:r>
+            <a:endParaRPr/>
+          </a:p>
+        </p:txBody>
+      </p:sp>
+    </p:spTree>
+  </p:cSld>
+  <p:clrMapOvr>
+    <a:masterClrMapping/>
+  </p:clrMapOvr>
+</p:notes>
+</file>
+
 <file path=ppt/notesSlides/notesSlide2.xml><?xml version="1.0" encoding="utf-8"?>
 <p:notes xmlns:a="http://schemas.openxmlformats.org/drawingml/2006/main" xmlns:r="http://schemas.openxmlformats.org/officeDocument/2006/relationships" xmlns:mc="http://schemas.openxmlformats.org/markup-compatibility/2006" xmlns:mv="urn:schemas-microsoft-com:mac:vml" xmlns:p="http://schemas.openxmlformats.org/presentationml/2006/main" xmlns:c="http://schemas.openxmlformats.org/drawingml/2006/chart" xmlns:dgm="http://schemas.openxmlformats.org/drawingml/2006/diagram" xmlns:o="urn:schemas-microsoft-com:office:office" xmlns:v="urn:schemas-microsoft-com:vml" xmlns:pvml="urn:schemas-microsoft-com:office:powerpoint" xmlns:com="http://schemas.openxmlformats.org/drawingml/2006/compatibility" xmlns:p14="http://schemas.microsoft.com/office/powerpoint/2010/main" xmlns:p15="http://schemas.microsoft.com/office/powerpoint/2012/main" xmlns:ahyp="http://schemas.microsoft.com/office/drawing/2018/hyperlinkcolor" showMasterPhAnim="0" showMasterSp="0">
   <p:cSld>
@@ -1002,7 +1103,7 @@
       </p:grpSpPr>
       <p:sp>
         <p:nvSpPr>
-          <p:cNvPr id="83" name="Google Shape;83;g10d8a3913ea_0_124:notes"/>
+          <p:cNvPr id="83" name="Google Shape;83;g3ebdb50b124_0_1:notes"/>
           <p:cNvSpPr/>
           <p:nvPr>
             <p:ph idx="2" type="sldImg"/>
@@ -1037,7 +1138,7 @@
       </p:sp>
       <p:sp>
         <p:nvSpPr>
-          <p:cNvPr id="84" name="Google Shape;84;g10d8a3913ea_0_124:notes"/>
+          <p:cNvPr id="84" name="Google Shape;84;g3ebdb50b124_0_1:notes"/>
           <p:cNvSpPr txBox="1"/>
           <p:nvPr>
             <p:ph idx="1" type="body"/>
@@ -1101,7 +1202,7 @@
       </p:grpSpPr>
       <p:sp>
         <p:nvSpPr>
-          <p:cNvPr id="89" name="Google Shape;89;g3eee7f97eec_0_1:notes"/>
+          <p:cNvPr id="89" name="Google Shape;89;g10d8a3913ea_0_124:notes"/>
           <p:cNvSpPr/>
           <p:nvPr>
             <p:ph idx="2" type="sldImg"/>
@@ -1136,7 +1237,7 @@
       </p:sp>
       <p:sp>
         <p:nvSpPr>
-          <p:cNvPr id="90" name="Google Shape;90;g3eee7f97eec_0_1:notes"/>
+          <p:cNvPr id="90" name="Google Shape;90;g10d8a3913ea_0_124:notes"/>
           <p:cNvSpPr txBox="1"/>
           <p:nvPr>
             <p:ph idx="1" type="body"/>
@@ -1299,7 +1400,7 @@
       </p:grpSpPr>
       <p:sp>
         <p:nvSpPr>
-          <p:cNvPr id="103" name="Google Shape;103;g10d8a3913ea_0_134:notes"/>
+          <p:cNvPr id="103" name="Google Shape;103;g3eee7f97eec_0_1:notes"/>
           <p:cNvSpPr/>
           <p:nvPr>
             <p:ph idx="2" type="sldImg"/>
@@ -1334,7 +1435,7 @@
       </p:sp>
       <p:sp>
         <p:nvSpPr>
-          <p:cNvPr id="104" name="Google Shape;104;g10d8a3913ea_0_134:notes"/>
+          <p:cNvPr id="104" name="Google Shape;104;g3eee7f97eec_0_1:notes"/>
           <p:cNvSpPr txBox="1"/>
           <p:nvPr>
             <p:ph idx="1" type="body"/>
@@ -1398,7 +1499,7 @@
       </p:grpSpPr>
       <p:sp>
         <p:nvSpPr>
-          <p:cNvPr id="109" name="Google Shape;109;g10d8a3913ea_0_139:notes"/>
+          <p:cNvPr id="109" name="Google Shape;109;g3ebdb50b124_0_7:notes"/>
           <p:cNvSpPr/>
           <p:nvPr>
             <p:ph idx="2" type="sldImg"/>
@@ -1433,7 +1534,106 @@
       </p:sp>
       <p:sp>
         <p:nvSpPr>
-          <p:cNvPr id="110" name="Google Shape;110;g10d8a3913ea_0_139:notes"/>
+          <p:cNvPr id="110" name="Google Shape;110;g3ebdb50b124_0_7:notes"/>
+          <p:cNvSpPr txBox="1"/>
+          <p:nvPr>
+            <p:ph idx="1" type="body"/>
+          </p:nvPr>
+        </p:nvSpPr>
+        <p:spPr>
+          <a:xfrm>
+            <a:off x="685800" y="4343400"/>
+            <a:ext cx="5486400" cy="4114800"/>
+          </a:xfrm>
+          <a:prstGeom prst="rect">
+            <a:avLst/>
+          </a:prstGeom>
+        </p:spPr>
+        <p:txBody>
+          <a:bodyPr anchorCtr="0" anchor="t" bIns="91425" lIns="91425" spcFirstLastPara="1" rIns="91425" wrap="square" tIns="91425">
+            <a:noAutofit/>
+          </a:bodyPr>
+          <a:lstStyle/>
+          <a:p>
+            <a:pPr indent="0" lvl="0" marL="0" rtl="0" algn="l">
+              <a:spcBef>
+                <a:spcPts val="0"/>
+              </a:spcBef>
+              <a:spcAft>
+                <a:spcPts val="0"/>
+              </a:spcAft>
+              <a:buNone/>
+            </a:pPr>
+            <a:r>
+              <a:t/>
+            </a:r>
+            <a:endParaRPr/>
+          </a:p>
+        </p:txBody>
+      </p:sp>
+    </p:spTree>
+  </p:cSld>
+  <p:clrMapOvr>
+    <a:masterClrMapping/>
+  </p:clrMapOvr>
+</p:notes>
+</file>
+
+<file path=ppt/notesSlides/notesSlide9.xml><?xml version="1.0" encoding="utf-8"?>
+<p:notes xmlns:a="http://schemas.openxmlformats.org/drawingml/2006/main" xmlns:r="http://schemas.openxmlformats.org/officeDocument/2006/relationships" xmlns:mc="http://schemas.openxmlformats.org/markup-compatibility/2006" xmlns:mv="urn:schemas-microsoft-com:mac:vml" xmlns:p="http://schemas.openxmlformats.org/presentationml/2006/main" xmlns:c="http://schemas.openxmlformats.org/drawingml/2006/chart" xmlns:dgm="http://schemas.openxmlformats.org/drawingml/2006/diagram" xmlns:o="urn:schemas-microsoft-com:office:office" xmlns:v="urn:schemas-microsoft-com:vml" xmlns:pvml="urn:schemas-microsoft-com:office:powerpoint" xmlns:com="http://schemas.openxmlformats.org/drawingml/2006/compatibility" xmlns:p14="http://schemas.microsoft.com/office/powerpoint/2010/main" xmlns:p15="http://schemas.microsoft.com/office/powerpoint/2012/main" xmlns:ahyp="http://schemas.microsoft.com/office/drawing/2018/hyperlinkcolor" showMasterPhAnim="0" showMasterSp="0">
+  <p:cSld>
+    <p:spTree>
+      <p:nvGrpSpPr>
+        <p:cNvPr id="114" name="Shape 114"/>
+        <p:cNvGrpSpPr/>
+        <p:nvPr/>
+      </p:nvGrpSpPr>
+      <p:grpSpPr>
+        <a:xfrm>
+          <a:off x="0" y="0"/>
+          <a:ext cx="0" cy="0"/>
+          <a:chOff x="0" y="0"/>
+          <a:chExt cx="0" cy="0"/>
+        </a:xfrm>
+      </p:grpSpPr>
+      <p:sp>
+        <p:nvSpPr>
+          <p:cNvPr id="115" name="Google Shape;115;g10d8a3913ea_0_134:notes"/>
+          <p:cNvSpPr/>
+          <p:nvPr>
+            <p:ph idx="2" type="sldImg"/>
+          </p:nvPr>
+        </p:nvSpPr>
+        <p:spPr>
+          <a:xfrm>
+            <a:off x="381175" y="685800"/>
+            <a:ext cx="6096300" cy="3429000"/>
+          </a:xfrm>
+          <a:custGeom>
+            <a:rect b="b" l="l" r="r" t="t"/>
+            <a:pathLst>
+              <a:path extrusionOk="0" h="120000" w="120000">
+                <a:moveTo>
+                  <a:pt x="0" y="0"/>
+                </a:moveTo>
+                <a:lnTo>
+                  <a:pt x="120000" y="0"/>
+                </a:lnTo>
+                <a:lnTo>
+                  <a:pt x="120000" y="120000"/>
+                </a:lnTo>
+                <a:lnTo>
+                  <a:pt x="0" y="120000"/>
+                </a:lnTo>
+                <a:close/>
+              </a:path>
+            </a:pathLst>
+          </a:custGeom>
+        </p:spPr>
+      </p:sp>
+      <p:sp>
+        <p:nvSpPr>
+          <p:cNvPr id="116" name="Google Shape;116;g10d8a3913ea_0_134:notes"/>
           <p:cNvSpPr txBox="1"/>
           <p:nvPr>
             <p:ph idx="1" type="body"/>
@@ -7447,6 +7647,215 @@
 </p:sld>
 </file>
 
+<file path=ppt/slides/slide10.xml><?xml version="1.0" encoding="utf-8"?>
+<p:sld xmlns:a="http://schemas.openxmlformats.org/drawingml/2006/main" xmlns:r="http://schemas.openxmlformats.org/officeDocument/2006/relationships" xmlns:mc="http://schemas.openxmlformats.org/markup-compatibility/2006" xmlns:mv="urn:schemas-microsoft-com:mac:vml" xmlns:p="http://schemas.openxmlformats.org/presentationml/2006/main" xmlns:c="http://schemas.openxmlformats.org/drawingml/2006/chart" xmlns:dgm="http://schemas.openxmlformats.org/drawingml/2006/diagram" xmlns:o="urn:schemas-microsoft-com:office:office" xmlns:v="urn:schemas-microsoft-com:vml" xmlns:pvml="urn:schemas-microsoft-com:office:powerpoint" xmlns:com="http://schemas.openxmlformats.org/drawingml/2006/compatibility" xmlns:p14="http://schemas.microsoft.com/office/powerpoint/2010/main" xmlns:p15="http://schemas.microsoft.com/office/powerpoint/2012/main" xmlns:ahyp="http://schemas.microsoft.com/office/drawing/2018/hyperlinkcolor">
+  <p:cSld>
+    <p:spTree>
+      <p:nvGrpSpPr>
+        <p:cNvPr id="123" name="Shape 123"/>
+        <p:cNvGrpSpPr/>
+        <p:nvPr/>
+      </p:nvGrpSpPr>
+      <p:grpSpPr>
+        <a:xfrm>
+          <a:off x="0" y="0"/>
+          <a:ext cx="0" cy="0"/>
+          <a:chOff x="0" y="0"/>
+          <a:chExt cx="0" cy="0"/>
+        </a:xfrm>
+      </p:grpSpPr>
+      <p:sp>
+        <p:nvSpPr>
+          <p:cNvPr id="124" name="Google Shape;124;p22"/>
+          <p:cNvSpPr txBox="1"/>
+          <p:nvPr>
+            <p:ph type="title"/>
+          </p:nvPr>
+        </p:nvSpPr>
+        <p:spPr>
+          <a:xfrm>
+            <a:off x="471900" y="57875"/>
+            <a:ext cx="8222100" cy="670500"/>
+          </a:xfrm>
+          <a:prstGeom prst="rect">
+            <a:avLst/>
+          </a:prstGeom>
+        </p:spPr>
+        <p:txBody>
+          <a:bodyPr anchorCtr="0" anchor="ctr" bIns="91425" lIns="91425" spcFirstLastPara="1" rIns="91425" wrap="square" tIns="91425">
+            <a:noAutofit/>
+          </a:bodyPr>
+          <a:lstStyle/>
+          <a:p>
+            <a:pPr indent="0" lvl="0" marL="0" rtl="0" algn="l">
+              <a:spcBef>
+                <a:spcPts val="0"/>
+              </a:spcBef>
+              <a:spcAft>
+                <a:spcPts val="0"/>
+              </a:spcAft>
+              <a:buNone/>
+            </a:pPr>
+            <a:r>
+              <a:rPr b="1" lang="en"/>
+              <a:t>Tài liệu tham khảo</a:t>
+            </a:r>
+            <a:endParaRPr/>
+          </a:p>
+        </p:txBody>
+      </p:sp>
+      <p:sp>
+        <p:nvSpPr>
+          <p:cNvPr id="125" name="Google Shape;125;p22"/>
+          <p:cNvSpPr txBox="1"/>
+          <p:nvPr>
+            <p:ph idx="1" type="body"/>
+          </p:nvPr>
+        </p:nvSpPr>
+        <p:spPr>
+          <a:xfrm>
+            <a:off x="471900" y="820500"/>
+            <a:ext cx="8222100" cy="3908400"/>
+          </a:xfrm>
+          <a:prstGeom prst="rect">
+            <a:avLst/>
+          </a:prstGeom>
+        </p:spPr>
+        <p:txBody>
+          <a:bodyPr anchorCtr="0" anchor="t" bIns="91425" lIns="91425" spcFirstLastPara="1" rIns="91425" wrap="square" tIns="91425">
+            <a:noAutofit/>
+          </a:bodyPr>
+          <a:lstStyle/>
+          <a:p>
+            <a:pPr indent="-317500" lvl="0" marL="457200" rtl="0" algn="l">
+              <a:lnSpc>
+                <a:spcPct val="100000"/>
+              </a:lnSpc>
+              <a:spcBef>
+                <a:spcPts val="0"/>
+              </a:spcBef>
+              <a:spcAft>
+                <a:spcPts val="0"/>
+              </a:spcAft>
+              <a:buSzPts val="1400"/>
+              <a:buChar char="●"/>
+            </a:pPr>
+            <a:r>
+              <a:rPr lang="en" sz="1400"/>
+              <a:t>[1] Emad Soliman, Khalid A. Alrasheed, Saud Alghanim, Emad Morsi: Integrating risk management and earned value framework to detect early warning signs - Case study. Journal of Engineering Research 13: 2109-2116 (2025).</a:t>
+            </a:r>
+            <a:endParaRPr sz="1400"/>
+          </a:p>
+          <a:p>
+            <a:pPr indent="-317500" lvl="0" marL="457200" rtl="0" algn="l">
+              <a:lnSpc>
+                <a:spcPct val="100000"/>
+              </a:lnSpc>
+              <a:spcBef>
+                <a:spcPts val="0"/>
+              </a:spcBef>
+              <a:spcAft>
+                <a:spcPts val="0"/>
+              </a:spcAft>
+              <a:buSzPts val="1400"/>
+              <a:buChar char="●"/>
+            </a:pPr>
+            <a:r>
+              <a:rPr lang="en" sz="1400"/>
+              <a:t>[2] Tolga Narbaev, Öncü Hazir, Balzhan Khamitova, Sezdbek Talgat: A machine learning study to improve the reliability of project cost estimates. International Journal of Production Research 62(12): 4372-4388 (2024).</a:t>
+            </a:r>
+            <a:endParaRPr sz="1400"/>
+          </a:p>
+          <a:p>
+            <a:pPr indent="-317500" lvl="0" marL="457200" rtl="0" algn="l">
+              <a:lnSpc>
+                <a:spcPct val="100000"/>
+              </a:lnSpc>
+              <a:spcBef>
+                <a:spcPts val="0"/>
+              </a:spcBef>
+              <a:spcAft>
+                <a:spcPts val="0"/>
+              </a:spcAft>
+              <a:buSzPts val="1400"/>
+              <a:buChar char="●"/>
+            </a:pPr>
+            <a:r>
+              <a:rPr lang="en" sz="1400"/>
+              <a:t>[3] José Ignacio Santos, María Pereda, Virginia Ahedo, José Manuel Galán: Explainable machine learning for project management control. Computers &amp; Industrial Engineering 180: 109261 (2023).</a:t>
+            </a:r>
+            <a:endParaRPr sz="1400"/>
+          </a:p>
+          <a:p>
+            <a:pPr indent="-317500" lvl="0" marL="457200" rtl="0" algn="l">
+              <a:lnSpc>
+                <a:spcPct val="100000"/>
+              </a:lnSpc>
+              <a:spcBef>
+                <a:spcPts val="0"/>
+              </a:spcBef>
+              <a:spcAft>
+                <a:spcPts val="0"/>
+              </a:spcAft>
+              <a:buSzPts val="1400"/>
+              <a:buChar char="●"/>
+            </a:pPr>
+            <a:r>
+              <a:rPr lang="en" sz="1400"/>
+              <a:t>[4] Filippo Maria Ottaviani, Pablo Ballesteros-Pérez, Tolga Narbaev: Automated machine learning pipeline for robust project cost and duration forecasting. Automation in Construction 178: 106426 (2025).</a:t>
+            </a:r>
+            <a:endParaRPr sz="1400"/>
+          </a:p>
+          <a:p>
+            <a:pPr indent="-317500" lvl="0" marL="457200" rtl="0" algn="l">
+              <a:lnSpc>
+                <a:spcPct val="100000"/>
+              </a:lnSpc>
+              <a:spcBef>
+                <a:spcPts val="0"/>
+              </a:spcBef>
+              <a:spcAft>
+                <a:spcPts val="0"/>
+              </a:spcAft>
+              <a:buSzPts val="1400"/>
+              <a:buChar char="●"/>
+            </a:pPr>
+            <a:r>
+              <a:rPr lang="en" sz="1400"/>
+              <a:t>[5] Aurélien Renault, Alexis Bondu, Antoine Cornuéjols, Vincent Lemaire: Early Classification of Time Series: A Survey and Benchmark. Transactions on Machine Learning Research (2025).</a:t>
+            </a:r>
+            <a:endParaRPr sz="1400"/>
+          </a:p>
+          <a:p>
+            <a:pPr indent="-317500" lvl="0" marL="457200" rtl="0" algn="l">
+              <a:lnSpc>
+                <a:spcPct val="100000"/>
+              </a:lnSpc>
+              <a:spcBef>
+                <a:spcPts val="0"/>
+              </a:spcBef>
+              <a:spcAft>
+                <a:spcPts val="0"/>
+              </a:spcAft>
+              <a:buSzPts val="1400"/>
+              <a:buChar char="●"/>
+            </a:pPr>
+            <a:r>
+              <a:rPr lang="en" sz="1400"/>
+              <a:t>[6] Project Management Institute: A Guide to the Project Management Body of Knowledge (PMBOK Guide) - Eighth Edition and The Standard for Project Management. Project Management Institute, Newtown Square, PA, USA (2025).</a:t>
+            </a:r>
+            <a:endParaRPr sz="1000"/>
+          </a:p>
+        </p:txBody>
+      </p:sp>
+    </p:spTree>
+  </p:cSld>
+  <p:clrMapOvr>
+    <a:masterClrMapping/>
+  </p:clrMapOvr>
+</p:sld>
+</file>
+
 <file path=ppt/slides/slide2.xml><?xml version="1.0" encoding="utf-8"?>
 <p:sld xmlns:a="http://schemas.openxmlformats.org/drawingml/2006/main" xmlns:r="http://schemas.openxmlformats.org/officeDocument/2006/relationships" xmlns:mc="http://schemas.openxmlformats.org/markup-compatibility/2006" xmlns:mv="urn:schemas-microsoft-com:mac:vml" xmlns:p="http://schemas.openxmlformats.org/presentationml/2006/main" xmlns:c="http://schemas.openxmlformats.org/drawingml/2006/chart" xmlns:dgm="http://schemas.openxmlformats.org/drawingml/2006/diagram" xmlns:o="urn:schemas-microsoft-com:office:office" xmlns:v="urn:schemas-microsoft-com:vml" xmlns:pvml="urn:schemas-microsoft-com:office:powerpoint" xmlns:com="http://schemas.openxmlformats.org/drawingml/2006/compatibility" xmlns:p14="http://schemas.microsoft.com/office/powerpoint/2010/main" xmlns:p15="http://schemas.microsoft.com/office/powerpoint/2012/main" xmlns:ahyp="http://schemas.microsoft.com/office/drawing/2018/hyperlinkcolor">
   <p:cSld>
@@ -7840,7 +8249,7 @@
             </a:pPr>
             <a:r>
               <a:rPr lang="en" sz="2100"/>
-              <a:t>là 1 loại chỉ số quản lý thời gian </a:t>
+              <a:t>là 1 phương pháp quản lý dự án </a:t>
             </a:r>
             <a:endParaRPr sz="2100"/>
           </a:p>
@@ -7856,7 +8265,7 @@
             </a:pPr>
             <a:r>
               <a:rPr lang="en" sz="2100"/>
-              <a:t>và ngân sách dự án qua các </a:t>
+              <a:t>qua các chỉ số như PV/EV/AC </a:t>
             </a:r>
             <a:endParaRPr sz="2100"/>
           </a:p>
@@ -7872,23 +8281,7 @@
             </a:pPr>
             <a:r>
               <a:rPr lang="en" sz="2100"/>
-              <a:t>chỉ số như Actual Cost (AC), </a:t>
-            </a:r>
-            <a:endParaRPr sz="2100"/>
-          </a:p>
-          <a:p>
-            <a:pPr indent="0" lvl="0" marL="457200" rtl="0" algn="l">
-              <a:spcBef>
-                <a:spcPts val="1000"/>
-              </a:spcBef>
-              <a:spcAft>
-                <a:spcPts val="0"/>
-              </a:spcAft>
-              <a:buNone/>
-            </a:pPr>
-            <a:r>
-              <a:rPr lang="en" sz="2100"/>
-              <a:t>Earned Value (EV),...</a:t>
+              <a:t>và CPI/SPI theo thời gian.</a:t>
             </a:r>
             <a:endParaRPr sz="2100"/>
           </a:p>
@@ -8011,7 +8404,7 @@
             </a:pPr>
             <a:r>
               <a:rPr b="1" lang="en"/>
-              <a:t>Mục tiêu</a:t>
+              <a:t>Giới thiệu</a:t>
             </a:r>
             <a:endParaRPr/>
           </a:p>
@@ -8027,7 +8420,7 @@
         </p:nvSpPr>
         <p:spPr>
           <a:xfrm>
-            <a:off x="471900" y="820500"/>
+            <a:off x="69550" y="864000"/>
             <a:ext cx="8222100" cy="3908400"/>
           </a:xfrm>
           <a:prstGeom prst="rect">
@@ -8041,6 +8434,9 @@
           <a:lstStyle/>
           <a:p>
             <a:pPr indent="0" lvl="0" marL="0" rtl="0" algn="l">
+              <a:lnSpc>
+                <a:spcPct val="115000"/>
+              </a:lnSpc>
               <a:spcBef>
                 <a:spcPts val="1000"/>
               </a:spcBef>
@@ -8050,96 +8446,98 @@
               <a:buNone/>
             </a:pPr>
             <a:r>
-              <a:rPr lang="en"/>
-              <a:t>Khoảng trống: chưa kết hợp chuỗi EVM, biến quản trị/rủi ro, cảnh báo sớm đa mốc và xAI.</a:t>
-            </a:r>
-            <a:endParaRPr/>
-          </a:p>
-          <a:p>
-            <a:pPr indent="-368300" lvl="0" marL="457200" rtl="0" algn="l">
-              <a:spcBef>
-                <a:spcPts val="1600"/>
-              </a:spcBef>
-              <a:spcAft>
-                <a:spcPts val="0"/>
-              </a:spcAft>
-              <a:buSzPts val="2200"/>
+              <a:rPr lang="en" sz="2100"/>
+              <a:t>Hướng hiện nay: EVM rule-based; ML dự báo; XAI; early time-series.</a:t>
+            </a:r>
+            <a:endParaRPr sz="2100"/>
+          </a:p>
+          <a:p>
+            <a:pPr indent="0" lvl="0" marL="0" rtl="0" algn="l">
+              <a:lnSpc>
+                <a:spcPct val="115000"/>
+              </a:lnSpc>
+              <a:spcBef>
+                <a:spcPts val="1000"/>
+              </a:spcBef>
+              <a:spcAft>
+                <a:spcPts val="0"/>
+              </a:spcAft>
+              <a:buNone/>
+            </a:pPr>
+            <a:r>
+              <a:t/>
+            </a:r>
+            <a:endParaRPr sz="2100"/>
+          </a:p>
+          <a:p>
+            <a:pPr indent="-361950" lvl="0" marL="457200" marR="0" rtl="0" algn="l">
+              <a:lnSpc>
+                <a:spcPct val="115000"/>
+              </a:lnSpc>
+              <a:spcBef>
+                <a:spcPts val="0"/>
+              </a:spcBef>
+              <a:spcAft>
+                <a:spcPts val="0"/>
+              </a:spcAft>
+              <a:buSzPts val="2100"/>
+              <a:buFont typeface="Arial"/>
               <a:buChar char="●"/>
             </a:pPr>
             <a:r>
-              <a:rPr lang="en"/>
-              <a:t>Xây dựng bộ dữ liệu EVM đã kiểm chứng và nhãn rủi ro.</a:t>
-            </a:r>
-            <a:endParaRPr/>
-          </a:p>
-          <a:p>
-            <a:pPr indent="-368300" lvl="0" marL="457200" rtl="0" algn="l">
+              <a:rPr lang="en" sz="2100"/>
+              <a:t>Gap: các hướng còn rời rạc - cảnh báo, dự báo, giải thích, phân loại sớm.</a:t>
+            </a:r>
+            <a:endParaRPr sz="2100"/>
+          </a:p>
+          <a:p>
+            <a:pPr indent="-361950" lvl="0" marL="457200" marR="0" rtl="0" algn="l">
+              <a:lnSpc>
+                <a:spcPct val="115000"/>
+              </a:lnSpc>
               <a:spcBef>
                 <a:spcPts val="1000"/>
               </a:spcBef>
               <a:spcAft>
                 <a:spcPts val="0"/>
               </a:spcAft>
-              <a:buSzPts val="2200"/>
+              <a:buSzPts val="2100"/>
+              <a:buFont typeface="Arial"/>
               <a:buChar char="●"/>
             </a:pPr>
             <a:r>
-              <a:rPr lang="en"/>
-              <a:t>Phát triển mô hình phân loại cảnh báo sớm tại các mốc thời gian trong vòng đời dự án.</a:t>
-            </a:r>
-            <a:endParaRPr/>
-          </a:p>
-          <a:p>
-            <a:pPr indent="-368300" lvl="0" marL="457200" rtl="0" algn="l">
+              <a:rPr lang="en" sz="2100"/>
+              <a:t>Thiếu framework kết hợp: EVM tháng + cảnh báo sớm + phân loại gán nhãn </a:t>
+            </a:r>
+            <a:r>
+              <a:rPr lang="en" sz="2100"/>
+              <a:t>Normal/Warning/Critical cho dự án </a:t>
+            </a:r>
+            <a:r>
+              <a:rPr lang="en" sz="2100"/>
+              <a:t>+ SHAP.</a:t>
+            </a:r>
+            <a:endParaRPr sz="1950"/>
+          </a:p>
+          <a:p>
+            <a:pPr indent="0" lvl="0" marL="457200" rtl="0" algn="l">
               <a:spcBef>
                 <a:spcPts val="1000"/>
               </a:spcBef>
               <a:spcAft>
                 <a:spcPts val="0"/>
               </a:spcAft>
-              <a:buSzPts val="2200"/>
-              <a:buChar char="●"/>
-            </a:pPr>
-            <a:r>
-              <a:rPr lang="en"/>
-              <a:t>Giải thích toàn cục/cục bộ bằng SHAP (XAI) và phân tích sự đánh đổi earliness-accuracy để khuyến nghị thời điểm can thiệp hợp lý.</a:t>
-            </a:r>
-            <a:endParaRPr/>
+              <a:buNone/>
+            </a:pPr>
+            <a:r>
+              <a:t/>
+            </a:r>
+            <a:endParaRPr sz="2100"/>
           </a:p>
           <a:p>
             <a:pPr indent="0" lvl="0" marL="457200" rtl="0" algn="l">
               <a:spcBef>
-                <a:spcPts val="1600"/>
-              </a:spcBef>
-              <a:spcAft>
-                <a:spcPts val="0"/>
-              </a:spcAft>
-              <a:buNone/>
-            </a:pPr>
-            <a:r>
-              <a:t/>
-            </a:r>
-            <a:endParaRPr/>
-          </a:p>
-          <a:p>
-            <a:pPr indent="0" lvl="0" marL="457200" rtl="0" algn="l">
-              <a:spcBef>
-                <a:spcPts val="1600"/>
-              </a:spcBef>
-              <a:spcAft>
-                <a:spcPts val="0"/>
-              </a:spcAft>
-              <a:buNone/>
-            </a:pPr>
-            <a:r>
-              <a:t/>
-            </a:r>
-            <a:endParaRPr/>
-          </a:p>
-          <a:p>
-            <a:pPr indent="0" lvl="0" marL="457200" rtl="0" algn="l">
-              <a:spcBef>
-                <a:spcPts val="1600"/>
+                <a:spcPts val="1000"/>
               </a:spcBef>
               <a:spcAft>
                 <a:spcPts val="0"/>
@@ -8227,7 +8625,7 @@
             </a:pPr>
             <a:r>
               <a:rPr b="1" lang="en"/>
-              <a:t>Nội dung và Phương pháp</a:t>
+              <a:t>Mục tiêu</a:t>
             </a:r>
             <a:endParaRPr/>
           </a:p>
@@ -8258,18 +8656,21 @@
           <a:p>
             <a:pPr indent="-368300" lvl="0" marL="457200" rtl="0" algn="l">
               <a:spcBef>
-                <a:spcPts val="0"/>
+                <a:spcPts val="1000"/>
               </a:spcBef>
               <a:spcAft>
                 <a:spcPts val="0"/>
               </a:spcAft>
               <a:buSzPts val="2200"/>
-              <a:buFont typeface="Arial"/>
               <a:buChar char="●"/>
             </a:pPr>
             <a:r>
               <a:rPr lang="en"/>
-              <a:t>Tổng hợp EVM, Earned Schedule, ECTS, XAI/SHAP và xử lý mất cân bằng dữ liệu.</a:t>
+              <a:t>K</a:t>
+            </a:r>
+            <a:r>
+              <a:rPr lang="en"/>
+              <a:t>iểm định bộ dữ liệu EVM và gán nhãn rủi ro.</a:t>
             </a:r>
             <a:endParaRPr/>
           </a:p>
@@ -8282,12 +8683,11 @@
                 <a:spcPts val="0"/>
               </a:spcAft>
               <a:buSzPts val="2200"/>
-              <a:buFont typeface="Arial"/>
               <a:buChar char="●"/>
             </a:pPr>
             <a:r>
               <a:rPr lang="en"/>
-              <a:t>Dataset validation: kiểm tra CPI=EV/AC, SPI=EV/PV, phân bố CPI/SPI/delay và tương quan logic.</a:t>
+              <a:t>Phát triển mô hình phân loại cảnh báo sớm tại các mốc thời gian trong vòng đời dự án từ các chỉ số EVM.</a:t>
             </a:r>
             <a:endParaRPr/>
           </a:p>
@@ -8300,19 +8700,33 @@
                 <a:spcPts val="0"/>
               </a:spcAft>
               <a:buSzPts val="2200"/>
-              <a:buFont typeface="Arial"/>
               <a:buChar char="●"/>
             </a:pPr>
             <a:r>
               <a:rPr lang="en"/>
-              <a:t>Gán nhãn: K-means/GMM trên Schedule_Delay + Cost_Overrun; đánh giá Silhouette và Davies-Bouldin.</a:t>
+              <a:t>Giải thích toàn cục/cục bộ bằng SHAP (XAI) và phân tích sự đánh đổi earliness-accuracy để khuyến nghị thời điểm can thiệp hợp lý.</a:t>
             </a:r>
             <a:endParaRPr/>
           </a:p>
           <a:p>
             <a:pPr indent="0" lvl="0" marL="457200" rtl="0" algn="l">
               <a:spcBef>
-                <a:spcPts val="1000"/>
+                <a:spcPts val="1600"/>
+              </a:spcBef>
+              <a:spcAft>
+                <a:spcPts val="0"/>
+              </a:spcAft>
+              <a:buNone/>
+            </a:pPr>
+            <a:r>
+              <a:t/>
+            </a:r>
+            <a:endParaRPr/>
+          </a:p>
+          <a:p>
+            <a:pPr indent="0" lvl="0" marL="457200" rtl="0" algn="l">
+              <a:spcBef>
+                <a:spcPts val="1600"/>
               </a:spcBef>
               <a:spcAft>
                 <a:spcPts val="0"/>
@@ -8431,8 +8845,8 @@
         </p:nvSpPr>
         <p:spPr>
           <a:xfrm>
-            <a:off x="471900" y="820500"/>
-            <a:ext cx="8222100" cy="3908400"/>
+            <a:off x="0" y="820500"/>
+            <a:ext cx="9144000" cy="3908400"/>
           </a:xfrm>
           <a:prstGeom prst="rect">
             <a:avLst/>
@@ -8444,103 +8858,26 @@
           </a:bodyPr>
           <a:lstStyle/>
           <a:p>
-            <a:pPr indent="-368300" lvl="0" marL="457200" marR="0" rtl="0" algn="l">
-              <a:lnSpc>
-                <a:spcPct val="115000"/>
-              </a:lnSpc>
-              <a:spcBef>
-                <a:spcPts val="0"/>
-              </a:spcBef>
-              <a:spcAft>
-                <a:spcPts val="0"/>
-              </a:spcAft>
-              <a:buSzPts val="2200"/>
+            <a:pPr indent="-355600" lvl="0" marL="457200" rtl="0" algn="l">
+              <a:spcBef>
+                <a:spcPts val="0"/>
+              </a:spcBef>
+              <a:spcAft>
+                <a:spcPts val="1000"/>
+              </a:spcAft>
+              <a:buSzPts val="2000"/>
               <a:buFont typeface="Arial"/>
               <a:buChar char="●"/>
             </a:pPr>
             <a:r>
-              <a:rPr lang="en"/>
-              <a:t>Trích đặc trưng ở các mốc thời gian (ví dụ 20/40/60%): EVM tại mốc T, tích lũy, độ dốc/biến thiên CPI-SPI và sáu biến tĩnh.</a:t>
-            </a:r>
-            <a:endParaRPr/>
-          </a:p>
-          <a:p>
-            <a:pPr indent="-368300" lvl="0" marL="457200" rtl="0" algn="l">
-              <a:spcBef>
-                <a:spcPts val="1000"/>
-              </a:spcBef>
-              <a:spcAft>
-                <a:spcPts val="0"/>
-              </a:spcAft>
-              <a:buSzPts val="2200"/>
-              <a:buFont typeface="Arial"/>
-              <a:buChar char="●"/>
-            </a:pPr>
-            <a:r>
-              <a:rPr lang="en"/>
-              <a:t>Huấn luyện/đánh giá: GroupKFold theo Project_ID; F1-macro, PR-AUC, ROC-AUC, Recall Critical; giải thích bằng SHAP và áp dụng earliness-accuracy.</a:t>
-            </a:r>
-            <a:endParaRPr/>
-          </a:p>
-          <a:p>
-            <a:pPr indent="0" lvl="0" marL="457200" rtl="0" algn="l">
-              <a:spcBef>
-                <a:spcPts val="1000"/>
-              </a:spcBef>
-              <a:spcAft>
-                <a:spcPts val="0"/>
-              </a:spcAft>
-              <a:buNone/>
-            </a:pPr>
-            <a:r>
-              <a:t/>
-            </a:r>
-            <a:endParaRPr/>
-          </a:p>
-          <a:p>
-            <a:pPr indent="0" lvl="0" marL="457200" rtl="0" algn="l">
-              <a:spcBef>
-                <a:spcPts val="1600"/>
-              </a:spcBef>
-              <a:spcAft>
-                <a:spcPts val="0"/>
-              </a:spcAft>
-              <a:buNone/>
-            </a:pPr>
-            <a:r>
-              <a:t/>
-            </a:r>
-            <a:endParaRPr/>
-          </a:p>
-          <a:p>
-            <a:pPr indent="0" lvl="0" marL="457200" rtl="0" algn="l">
-              <a:spcBef>
-                <a:spcPts val="1600"/>
-              </a:spcBef>
-              <a:spcAft>
-                <a:spcPts val="0"/>
-              </a:spcAft>
-              <a:buNone/>
-            </a:pPr>
-            <a:r>
-              <a:t/>
-            </a:r>
-            <a:endParaRPr/>
-          </a:p>
-          <a:p>
-            <a:pPr indent="0" lvl="0" marL="914400" rtl="0" algn="l">
-              <a:spcBef>
-                <a:spcPts val="1600"/>
-              </a:spcBef>
-              <a:spcAft>
-                <a:spcPts val="1600"/>
-              </a:spcAft>
-              <a:buNone/>
-            </a:pPr>
-            <a:r>
-              <a:t/>
-            </a:r>
-            <a:endParaRPr sz="1800"/>
+              <a:rPr b="1" lang="en" sz="2000"/>
+              <a:t>Quy trình</a:t>
+            </a:r>
+            <a:r>
+              <a:rPr lang="en" sz="2000"/>
+              <a:t>: validate dataset-&gt; sinh nhãn -&gt; huấn luyện các mô hình -&gt; SHAP -&gt; phân tích đánh đổi độ sớm - độ chính xác.</a:t>
+            </a:r>
+            <a:endParaRPr sz="2000"/>
           </a:p>
         </p:txBody>
       </p:sp>
@@ -8560,7 +8897,7 @@
         </p:blipFill>
         <p:spPr>
           <a:xfrm>
-            <a:off x="5062950" y="2568775"/>
+            <a:off x="5073825" y="2079425"/>
             <a:ext cx="3064826" cy="2383325"/>
           </a:xfrm>
           <a:prstGeom prst="rect">
@@ -8588,7 +8925,7 @@
         </p:blipFill>
         <p:spPr>
           <a:xfrm>
-            <a:off x="1033849" y="2952537"/>
+            <a:off x="859874" y="2568787"/>
             <a:ext cx="3448475" cy="1776350"/>
           </a:xfrm>
           <a:prstGeom prst="rect">
@@ -8659,7 +8996,7 @@
             </a:pPr>
             <a:r>
               <a:rPr b="1" lang="en"/>
-              <a:t>Kết quả dự kiến</a:t>
+              <a:t>Nội dung và Phương pháp</a:t>
             </a:r>
             <a:endParaRPr/>
           </a:p>
@@ -8689,9 +9026,6 @@
           <a:lstStyle/>
           <a:p>
             <a:pPr indent="-368300" lvl="0" marL="457200" rtl="0" algn="l">
-              <a:lnSpc>
-                <a:spcPct val="115000"/>
-              </a:lnSpc>
               <a:spcBef>
                 <a:spcPts val="0"/>
               </a:spcBef>
@@ -8699,19 +9033,17 @@
                 <a:spcPts val="0"/>
               </a:spcAft>
               <a:buSzPts val="2200"/>
+              <a:buFont typeface="Arial"/>
               <a:buChar char="●"/>
             </a:pPr>
             <a:r>
               <a:rPr lang="en"/>
-              <a:t>Sản phẩm 1: bộ dữ liệu đã kiểm chứng, bộ nhãn Outcome Risk Class và đặc trưng tại 20/40/60%.</a:t>
+              <a:t>Dataset validation: kiểm tra CPI=EV/AC, SPI=EV/PV, phân bố CPI/SPI/delay và tương quan logic.</a:t>
             </a:r>
             <a:endParaRPr/>
           </a:p>
           <a:p>
             <a:pPr indent="-368300" lvl="0" marL="457200" rtl="0" algn="l">
-              <a:lnSpc>
-                <a:spcPct val="115000"/>
-              </a:lnSpc>
               <a:spcBef>
                 <a:spcPts val="1000"/>
               </a:spcBef>
@@ -8719,19 +9051,17 @@
                 <a:spcPts val="0"/>
               </a:spcAft>
               <a:buSzPts val="2200"/>
+              <a:buFont typeface="Arial"/>
               <a:buChar char="●"/>
             </a:pPr>
             <a:r>
               <a:rPr lang="en"/>
-              <a:t>Sản phẩm 2: hệ thống phân loại cảnh báo sớm và bảng so sánh baseline EVM/ML/proposed model.</a:t>
+              <a:t>Gán nhãn: K-means/GMM trên Schedule_Delay + Cost_Overrun; đánh giá Silhouette và Davies-Bouldin.</a:t>
             </a:r>
             <a:endParaRPr/>
           </a:p>
           <a:p>
             <a:pPr indent="-368300" lvl="0" marL="457200" rtl="0" algn="l">
-              <a:lnSpc>
-                <a:spcPct val="115000"/>
-              </a:lnSpc>
               <a:spcBef>
                 <a:spcPts val="1000"/>
               </a:spcBef>
@@ -8739,48 +9069,23 @@
                 <a:spcPts val="0"/>
               </a:spcAft>
               <a:buSzPts val="2200"/>
+              <a:buFont typeface="Arial"/>
               <a:buChar char="●"/>
             </a:pPr>
             <a:r>
               <a:rPr lang="en"/>
-              <a:t>Sản phẩm 3: báo cáo SHAP toàn cục/cục bộ, đường cong earliness-accuracy và khuyến nghị dashboard.</a:t>
-            </a:r>
-            <a:endParaRPr/>
-          </a:p>
-          <a:p>
-            <a:pPr indent="0" lvl="0" marL="0" rtl="0" algn="l">
+              <a:t>Huấn luyện các mô hình machine learning (Ví dụ: XGBoost/ LightGBM) để phân loại các mốc </a:t>
+            </a:r>
+            <a:r>
+              <a:rPr lang="en" sz="2100"/>
+              <a:t>Normal/Warning/Critical.</a:t>
+            </a:r>
+            <a:endParaRPr sz="2100"/>
+          </a:p>
+          <a:p>
+            <a:pPr indent="0" lvl="0" marL="457200" rtl="0" algn="l">
               <a:spcBef>
                 <a:spcPts val="1000"/>
-              </a:spcBef>
-              <a:spcAft>
-                <a:spcPts val="0"/>
-              </a:spcAft>
-              <a:buNone/>
-            </a:pPr>
-            <a:r>
-              <a:t/>
-            </a:r>
-            <a:endParaRPr/>
-          </a:p>
-          <a:p>
-            <a:pPr indent="0" lvl="0" marL="457200" rtl="0" algn="l">
-              <a:spcBef>
-                <a:spcPts val="1600"/>
-              </a:spcBef>
-              <a:spcAft>
-                <a:spcPts val="0"/>
-              </a:spcAft>
-              <a:buNone/>
-            </a:pPr>
-            <a:r>
-              <a:t/>
-            </a:r>
-            <a:endParaRPr/>
-          </a:p>
-          <a:p>
-            <a:pPr indent="0" lvl="0" marL="457200" rtl="0" algn="l">
-              <a:spcBef>
-                <a:spcPts val="1600"/>
               </a:spcBef>
               <a:spcAft>
                 <a:spcPts val="0"/>
@@ -8883,7 +9188,7 @@
             </a:pPr>
             <a:r>
               <a:rPr b="1" lang="en"/>
-              <a:t>Tài liệu tham khảo</a:t>
+              <a:t>Nội dung và Phương pháp</a:t>
             </a:r>
             <a:endParaRPr/>
           </a:p>
@@ -8912,9 +9217,246 @@
           </a:bodyPr>
           <a:lstStyle/>
           <a:p>
-            <a:pPr indent="-317500" lvl="0" marL="457200" rtl="0" algn="l">
+            <a:pPr indent="-368300" lvl="0" marL="457200" rtl="0" algn="l">
+              <a:spcBef>
+                <a:spcPts val="0"/>
+              </a:spcBef>
+              <a:spcAft>
+                <a:spcPts val="0"/>
+              </a:spcAft>
+              <a:buSzPts val="2200"/>
+              <a:buFont typeface="Arial"/>
+              <a:buChar char="●"/>
+            </a:pPr>
+            <a:r>
+              <a:rPr b="1" lang="en"/>
+              <a:t>Dataset</a:t>
+            </a:r>
+            <a:r>
+              <a:rPr lang="en"/>
+              <a:t>: khoảng 1.000 dự án, 12-60 tháng, ~36.000 dòng sau trải phẳng; gồm EVM và biến rủi ro/quản trị.</a:t>
+            </a:r>
+            <a:endParaRPr/>
+          </a:p>
+          <a:p>
+            <a:pPr indent="-368300" lvl="0" marL="457200" rtl="0" algn="l">
+              <a:spcBef>
+                <a:spcPts val="1000"/>
+              </a:spcBef>
+              <a:spcAft>
+                <a:spcPts val="0"/>
+              </a:spcAft>
+              <a:buSzPts val="2200"/>
+              <a:buFont typeface="Arial"/>
+              <a:buChar char="●"/>
+            </a:pPr>
+            <a:r>
+              <a:rPr b="1" lang="en"/>
+              <a:t>Implementation</a:t>
+            </a:r>
+            <a:r>
+              <a:rPr lang="en"/>
+              <a:t>: Python, scikit-learn, imbalanced-learn, XGBoost/LightGBM, SHAP; GroupKFold để gán nhãn dữ liệu theo Project_ID.</a:t>
+            </a:r>
+            <a:endParaRPr/>
+          </a:p>
+          <a:p>
+            <a:pPr indent="-368300" lvl="0" marL="457200" rtl="0" algn="l">
+              <a:spcBef>
+                <a:spcPts val="1000"/>
+              </a:spcBef>
+              <a:spcAft>
+                <a:spcPts val="0"/>
+              </a:spcAft>
+              <a:buSzPts val="2200"/>
+              <a:buFont typeface="Arial"/>
+              <a:buChar char="●"/>
+            </a:pPr>
+            <a:r>
+              <a:rPr b="1" lang="en"/>
+              <a:t>Xử lý mất cân bằng:</a:t>
+            </a:r>
+            <a:r>
+              <a:rPr lang="en"/>
+              <a:t> class weight hoặc SMOTE và biến thể.</a:t>
+            </a:r>
+            <a:endParaRPr/>
+          </a:p>
+          <a:p>
+            <a:pPr indent="-368300" lvl="0" marL="457200" rtl="0" algn="l">
+              <a:spcBef>
+                <a:spcPts val="1000"/>
+              </a:spcBef>
+              <a:spcAft>
+                <a:spcPts val="0"/>
+              </a:spcAft>
+              <a:buSzPts val="2200"/>
+              <a:buFont typeface="Arial"/>
+              <a:buChar char="●"/>
+            </a:pPr>
+            <a:r>
+              <a:rPr b="1" lang="en"/>
+              <a:t>Evaluation</a:t>
+            </a:r>
+            <a:r>
+              <a:rPr lang="en"/>
+              <a:t>: F1-macro, PR-AUC, ROC-AUC, Recall Critical; so sánh baseline EVM, ML phổ biến và proposed model.</a:t>
+            </a:r>
+            <a:endParaRPr/>
+          </a:p>
+          <a:p>
+            <a:pPr indent="0" lvl="0" marL="457200" rtl="0" algn="l">
+              <a:spcBef>
+                <a:spcPts val="1000"/>
+              </a:spcBef>
+              <a:spcAft>
+                <a:spcPts val="0"/>
+              </a:spcAft>
+              <a:buNone/>
+            </a:pPr>
+            <a:r>
+              <a:t/>
+            </a:r>
+            <a:endParaRPr/>
+          </a:p>
+          <a:p>
+            <a:pPr indent="0" lvl="0" marL="457200" rtl="0" algn="l">
+              <a:spcBef>
+                <a:spcPts val="1600"/>
+              </a:spcBef>
+              <a:spcAft>
+                <a:spcPts val="0"/>
+              </a:spcAft>
+              <a:buNone/>
+            </a:pPr>
+            <a:r>
+              <a:t/>
+            </a:r>
+            <a:endParaRPr/>
+          </a:p>
+          <a:p>
+            <a:pPr indent="0" lvl="0" marL="457200" rtl="0" algn="l">
+              <a:spcBef>
+                <a:spcPts val="1600"/>
+              </a:spcBef>
+              <a:spcAft>
+                <a:spcPts val="0"/>
+              </a:spcAft>
+              <a:buNone/>
+            </a:pPr>
+            <a:r>
+              <a:t/>
+            </a:r>
+            <a:endParaRPr/>
+          </a:p>
+          <a:p>
+            <a:pPr indent="0" lvl="0" marL="914400" rtl="0" algn="l">
+              <a:spcBef>
+                <a:spcPts val="1600"/>
+              </a:spcBef>
+              <a:spcAft>
+                <a:spcPts val="1600"/>
+              </a:spcAft>
+              <a:buNone/>
+            </a:pPr>
+            <a:r>
+              <a:t/>
+            </a:r>
+            <a:endParaRPr sz="1800"/>
+          </a:p>
+        </p:txBody>
+      </p:sp>
+    </p:spTree>
+  </p:cSld>
+  <p:clrMapOvr>
+    <a:masterClrMapping/>
+  </p:clrMapOvr>
+</p:sld>
+</file>
+
+<file path=ppt/slides/slide9.xml><?xml version="1.0" encoding="utf-8"?>
+<p:sld xmlns:a="http://schemas.openxmlformats.org/drawingml/2006/main" xmlns:r="http://schemas.openxmlformats.org/officeDocument/2006/relationships" xmlns:mc="http://schemas.openxmlformats.org/markup-compatibility/2006" xmlns:mv="urn:schemas-microsoft-com:mac:vml" xmlns:p="http://schemas.openxmlformats.org/presentationml/2006/main" xmlns:c="http://schemas.openxmlformats.org/drawingml/2006/chart" xmlns:dgm="http://schemas.openxmlformats.org/drawingml/2006/diagram" xmlns:o="urn:schemas-microsoft-com:office:office" xmlns:v="urn:schemas-microsoft-com:vml" xmlns:pvml="urn:schemas-microsoft-com:office:powerpoint" xmlns:com="http://schemas.openxmlformats.org/drawingml/2006/compatibility" xmlns:p14="http://schemas.microsoft.com/office/powerpoint/2010/main" xmlns:p15="http://schemas.microsoft.com/office/powerpoint/2012/main" xmlns:ahyp="http://schemas.microsoft.com/office/drawing/2018/hyperlinkcolor">
+  <p:cSld>
+    <p:spTree>
+      <p:nvGrpSpPr>
+        <p:cNvPr id="117" name="Shape 117"/>
+        <p:cNvGrpSpPr/>
+        <p:nvPr/>
+      </p:nvGrpSpPr>
+      <p:grpSpPr>
+        <a:xfrm>
+          <a:off x="0" y="0"/>
+          <a:ext cx="0" cy="0"/>
+          <a:chOff x="0" y="0"/>
+          <a:chExt cx="0" cy="0"/>
+        </a:xfrm>
+      </p:grpSpPr>
+      <p:sp>
+        <p:nvSpPr>
+          <p:cNvPr id="118" name="Google Shape;118;p21"/>
+          <p:cNvSpPr txBox="1"/>
+          <p:nvPr>
+            <p:ph type="title"/>
+          </p:nvPr>
+        </p:nvSpPr>
+        <p:spPr>
+          <a:xfrm>
+            <a:off x="471900" y="57875"/>
+            <a:ext cx="8222100" cy="670500"/>
+          </a:xfrm>
+          <a:prstGeom prst="rect">
+            <a:avLst/>
+          </a:prstGeom>
+        </p:spPr>
+        <p:txBody>
+          <a:bodyPr anchorCtr="0" anchor="ctr" bIns="91425" lIns="91425" spcFirstLastPara="1" rIns="91425" wrap="square" tIns="91425">
+            <a:noAutofit/>
+          </a:bodyPr>
+          <a:lstStyle/>
+          <a:p>
+            <a:pPr indent="0" lvl="0" marL="0" rtl="0" algn="l">
+              <a:spcBef>
+                <a:spcPts val="0"/>
+              </a:spcBef>
+              <a:spcAft>
+                <a:spcPts val="0"/>
+              </a:spcAft>
+              <a:buNone/>
+            </a:pPr>
+            <a:r>
+              <a:rPr b="1" lang="en"/>
+              <a:t>Kết quả dự kiến</a:t>
+            </a:r>
+            <a:endParaRPr/>
+          </a:p>
+        </p:txBody>
+      </p:sp>
+      <p:sp>
+        <p:nvSpPr>
+          <p:cNvPr id="119" name="Google Shape;119;p21"/>
+          <p:cNvSpPr txBox="1"/>
+          <p:nvPr>
+            <p:ph idx="1" type="body"/>
+          </p:nvPr>
+        </p:nvSpPr>
+        <p:spPr>
+          <a:xfrm>
+            <a:off x="471900" y="820500"/>
+            <a:ext cx="8222100" cy="3908400"/>
+          </a:xfrm>
+          <a:prstGeom prst="rect">
+            <a:avLst/>
+          </a:prstGeom>
+        </p:spPr>
+        <p:txBody>
+          <a:bodyPr anchorCtr="0" anchor="t" bIns="91425" lIns="91425" spcFirstLastPara="1" rIns="91425" wrap="square" tIns="91425">
+            <a:noAutofit/>
+          </a:bodyPr>
+          <a:lstStyle/>
+          <a:p>
+            <a:pPr indent="-368300" lvl="0" marL="457200" rtl="0" algn="l">
               <a:lnSpc>
-                <a:spcPct val="100000"/>
+                <a:spcPct val="115000"/>
               </a:lnSpc>
               <a:spcBef>
                 <a:spcPts val="0"/>
@@ -8922,114 +9464,141 @@
               <a:spcAft>
                 <a:spcPts val="0"/>
               </a:spcAft>
-              <a:buSzPts val="1400"/>
+              <a:buSzPts val="2200"/>
               <a:buChar char="●"/>
             </a:pPr>
             <a:r>
-              <a:rPr lang="en" sz="1400"/>
-              <a:t>[1] Emad Soliman, Khalid A. Alrasheed, Saud Alghanim, Emad Morsi: Integrating risk management and earned value framework to detect early warning signs - Case study. Journal of Engineering Research 13: 2109-2116 (2025).</a:t>
-            </a:r>
-            <a:endParaRPr sz="1400"/>
-          </a:p>
-          <a:p>
-            <a:pPr indent="-317500" lvl="0" marL="457200" rtl="0" algn="l">
+              <a:rPr lang="en"/>
+              <a:t>Sản phẩm 1: bộ dữ liệu đã kiểm chứng, bộ nhãn </a:t>
+            </a:r>
+            <a:r>
+              <a:rPr lang="en" sz="2100"/>
+              <a:t>Normal/Warning/Critical</a:t>
+            </a:r>
+            <a:r>
+              <a:rPr lang="en"/>
+              <a:t> và đặc trưng tại các mốc thời gian 20/40/60%</a:t>
+            </a:r>
+            <a:r>
+              <a:rPr lang="en"/>
+              <a:t>.</a:t>
+            </a:r>
+            <a:endParaRPr/>
+          </a:p>
+          <a:p>
+            <a:pPr indent="-368300" lvl="0" marL="457200" rtl="0" algn="l">
               <a:lnSpc>
-                <a:spcPct val="100000"/>
+                <a:spcPct val="115000"/>
               </a:lnSpc>
               <a:spcBef>
-                <a:spcPts val="0"/>
-              </a:spcBef>
-              <a:spcAft>
-                <a:spcPts val="0"/>
-              </a:spcAft>
-              <a:buSzPts val="1400"/>
+                <a:spcPts val="1000"/>
+              </a:spcBef>
+              <a:spcAft>
+                <a:spcPts val="0"/>
+              </a:spcAft>
+              <a:buSzPts val="2200"/>
               <a:buChar char="●"/>
             </a:pPr>
             <a:r>
-              <a:rPr lang="en" sz="1400"/>
-              <a:t>[2] Tolga Narbaev, Öncü Hazir, Balzhan Khamitova, Sezdbek Talgat: A machine learning study to improve the reliability of project cost estimates. International Journal of Production Research 62(12): 4372-4388 (2024).</a:t>
-            </a:r>
-            <a:endParaRPr sz="1400"/>
-          </a:p>
-          <a:p>
-            <a:pPr indent="-317500" lvl="0" marL="457200" rtl="0" algn="l">
+              <a:rPr lang="en"/>
+              <a:t>Sản phẩm 2: hệ thống phân loại cảnh báo sớm và bảng so sánh với các baseline: EVM/ML/proposed model.</a:t>
+            </a:r>
+            <a:endParaRPr/>
+          </a:p>
+          <a:p>
+            <a:pPr indent="-368300" lvl="0" marL="457200" rtl="0" algn="l">
               <a:lnSpc>
-                <a:spcPct val="100000"/>
+                <a:spcPct val="115000"/>
               </a:lnSpc>
               <a:spcBef>
-                <a:spcPts val="0"/>
-              </a:spcBef>
-              <a:spcAft>
-                <a:spcPts val="0"/>
-              </a:spcAft>
-              <a:buSzPts val="1400"/>
+                <a:spcPts val="1000"/>
+              </a:spcBef>
+              <a:spcAft>
+                <a:spcPts val="0"/>
+              </a:spcAft>
+              <a:buSzPts val="2200"/>
               <a:buChar char="●"/>
             </a:pPr>
             <a:r>
-              <a:rPr lang="en" sz="1400"/>
-              <a:t>[3] José Ignacio Santos, María Pereda, Virginia Ahedo, José Manuel Galán: Explainable machine learning for project management control. Computers &amp; Industrial Engineering 180: 109261 (2023).</a:t>
-            </a:r>
-            <a:endParaRPr sz="1400"/>
-          </a:p>
-          <a:p>
-            <a:pPr indent="-317500" lvl="0" marL="457200" rtl="0" algn="l">
-              <a:lnSpc>
-                <a:spcPct val="100000"/>
-              </a:lnSpc>
-              <a:spcBef>
-                <a:spcPts val="0"/>
-              </a:spcBef>
-              <a:spcAft>
-                <a:spcPts val="0"/>
-              </a:spcAft>
-              <a:buSzPts val="1400"/>
-              <a:buChar char="●"/>
-            </a:pPr>
-            <a:r>
-              <a:rPr lang="en" sz="1400"/>
-              <a:t>[4] Filippo Maria Ottaviani, Pablo Ballesteros-Pérez, Tolga Narbaev: Automated machine learning pipeline for robust project cost and duration forecasting. Automation in Construction 178: 106426 (2025).</a:t>
-            </a:r>
-            <a:endParaRPr sz="1400"/>
-          </a:p>
-          <a:p>
-            <a:pPr indent="-317500" lvl="0" marL="457200" rtl="0" algn="l">
-              <a:lnSpc>
-                <a:spcPct val="100000"/>
-              </a:lnSpc>
-              <a:spcBef>
-                <a:spcPts val="0"/>
-              </a:spcBef>
-              <a:spcAft>
-                <a:spcPts val="0"/>
-              </a:spcAft>
-              <a:buSzPts val="1400"/>
-              <a:buChar char="●"/>
-            </a:pPr>
-            <a:r>
-              <a:rPr lang="en" sz="1400"/>
-              <a:t>[5] Aurélien Renault, Alexis Bondu, Antoine Cornuéjols, Vincent Lemaire: Early Classification of Time Series: A Survey and Benchmark. Transactions on Machine Learning Research (2025).</a:t>
-            </a:r>
-            <a:endParaRPr sz="1400"/>
-          </a:p>
-          <a:p>
-            <a:pPr indent="-317500" lvl="0" marL="457200" rtl="0" algn="l">
-              <a:lnSpc>
-                <a:spcPct val="100000"/>
-              </a:lnSpc>
-              <a:spcBef>
-                <a:spcPts val="0"/>
-              </a:spcBef>
-              <a:spcAft>
-                <a:spcPts val="0"/>
-              </a:spcAft>
-              <a:buSzPts val="1400"/>
-              <a:buChar char="●"/>
-            </a:pPr>
-            <a:r>
-              <a:rPr lang="en" sz="1400"/>
-              <a:t>[6] Project Management Institute: A Guide to the Project Management Body of Knowledge (PMBOK Guide) - Eighth Edition and The Standard for Project Management. Project Management Institute, Newtown Square, PA, USA (2025).</a:t>
-            </a:r>
-            <a:endParaRPr sz="1000"/>
+              <a:rPr lang="en"/>
+              <a:t>Sản phẩm 3: phân tích đánh đổi earliness-accuracy để tìm ra thời điểm thích hợp nhất để cảnh báo sớm cho dự án.</a:t>
+            </a:r>
+            <a:endParaRPr/>
+          </a:p>
+          <a:p>
+            <a:pPr indent="0" lvl="0" marL="0" rtl="0" algn="l">
+              <a:spcBef>
+                <a:spcPts val="1000"/>
+              </a:spcBef>
+              <a:spcAft>
+                <a:spcPts val="0"/>
+              </a:spcAft>
+              <a:buNone/>
+            </a:pPr>
+            <a:r>
+              <a:t/>
+            </a:r>
+            <a:endParaRPr/>
+          </a:p>
+          <a:p>
+            <a:pPr indent="0" lvl="0" marL="457200" rtl="0" algn="l">
+              <a:spcBef>
+                <a:spcPts val="1600"/>
+              </a:spcBef>
+              <a:spcAft>
+                <a:spcPts val="0"/>
+              </a:spcAft>
+              <a:buNone/>
+            </a:pPr>
+            <a:r>
+              <a:t/>
+            </a:r>
+            <a:endParaRPr/>
+          </a:p>
+          <a:p>
+            <a:pPr indent="0" lvl="0" marL="457200" rtl="0" algn="l">
+              <a:spcBef>
+                <a:spcPts val="1600"/>
+              </a:spcBef>
+              <a:spcAft>
+                <a:spcPts val="0"/>
+              </a:spcAft>
+              <a:buNone/>
+            </a:pPr>
+            <a:r>
+              <a:t/>
+            </a:r>
+            <a:endParaRPr/>
+          </a:p>
+          <a:p>
+            <a:pPr indent="0" lvl="0" marL="457200" rtl="0" algn="l">
+              <a:spcBef>
+                <a:spcPts val="1600"/>
+              </a:spcBef>
+              <a:spcAft>
+                <a:spcPts val="0"/>
+              </a:spcAft>
+              <a:buNone/>
+            </a:pPr>
+            <a:r>
+              <a:t/>
+            </a:r>
+            <a:endParaRPr/>
+          </a:p>
+          <a:p>
+            <a:pPr indent="0" lvl="0" marL="914400" rtl="0" algn="l">
+              <a:spcBef>
+                <a:spcPts val="1600"/>
+              </a:spcBef>
+              <a:spcAft>
+                <a:spcPts val="1600"/>
+              </a:spcAft>
+              <a:buNone/>
+            </a:pPr>
+            <a:r>
+              <a:t/>
+            </a:r>
+            <a:endParaRPr sz="1800"/>
           </a:p>
         </p:txBody>
       </p:sp>
@@ -9042,6 +9611,285 @@
 </file>
 
 <file path=ppt/theme/theme1.xml><?xml version="1.0" encoding="utf-8"?>
+<a:theme xmlns:a="http://schemas.openxmlformats.org/drawingml/2006/main" xmlns:r="http://schemas.openxmlformats.org/officeDocument/2006/relationships" name="Material - R01">
+  <a:themeElements>
+    <a:clrScheme name="Material">
+      <a:dk1>
+        <a:srgbClr val="4285F4"/>
+      </a:dk1>
+      <a:lt1>
+        <a:srgbClr val="FFFFFF"/>
+      </a:lt1>
+      <a:dk2>
+        <a:srgbClr val="424242"/>
+      </a:dk2>
+      <a:lt2>
+        <a:srgbClr val="737373"/>
+      </a:lt2>
+      <a:accent1>
+        <a:srgbClr val="0277BD"/>
+      </a:accent1>
+      <a:accent2>
+        <a:srgbClr val="0F9D58"/>
+      </a:accent2>
+      <a:accent3>
+        <a:srgbClr val="DB4437"/>
+      </a:accent3>
+      <a:accent4>
+        <a:srgbClr val="FAFAFA"/>
+      </a:accent4>
+      <a:accent5>
+        <a:srgbClr val="4FC3F7"/>
+      </a:accent5>
+      <a:accent6>
+        <a:srgbClr val="F4B400"/>
+      </a:accent6>
+      <a:hlink>
+        <a:srgbClr val="4FC3F7"/>
+      </a:hlink>
+      <a:folHlink>
+        <a:srgbClr val="4FC3F7"/>
+      </a:folHlink>
+    </a:clrScheme>
+    <a:fontScheme name="Office">
+      <a:majorFont>
+        <a:latin typeface="Arial"/>
+        <a:ea typeface=""/>
+        <a:cs typeface=""/>
+        <a:font script="Jpan" typeface="ＭＳ Ｐゴシック"/>
+        <a:font script="Hang" typeface="맑은 고딕"/>
+        <a:font script="Hans" typeface="宋体"/>
+        <a:font script="Hant" typeface="新細明體"/>
+        <a:font script="Arab" typeface="Times New Roman"/>
+        <a:font script="Hebr" typeface="Times New Roman"/>
+        <a:font script="Thai" typeface="Angsana New"/>
+        <a:font script="Ethi" typeface="Nyala"/>
+        <a:font script="Beng" typeface="Vrinda"/>
+        <a:font script="Gujr" typeface="Shruti"/>
+        <a:font script="Khmr" typeface="MoolBoran"/>
+        <a:font script="Knda" typeface="Tunga"/>
+        <a:font script="Guru" typeface="Raavi"/>
+        <a:font script="Cans" typeface="Euphemia"/>
+        <a:font script="Cher" typeface="Plantagenet Cherokee"/>
+        <a:font script="Yiii" typeface="Microsoft Yi Baiti"/>
+        <a:font script="Tibt" typeface="Microsoft Himalaya"/>
+        <a:font script="Thaa" typeface="MV Boli"/>
+        <a:font script="Deva" typeface="Mangal"/>
+        <a:font script="Telu" typeface="Gautami"/>
+        <a:font script="Taml" typeface="Latha"/>
+        <a:font script="Syrc" typeface="Estrangelo Edessa"/>
+        <a:font script="Orya" typeface="Kalinga"/>
+        <a:font script="Mlym" typeface="Kartika"/>
+        <a:font script="Laoo" typeface="DokChampa"/>
+        <a:font script="Sinh" typeface="Iskoola Pota"/>
+        <a:font script="Mong" typeface="Mongolian Baiti"/>
+        <a:font script="Viet" typeface="Times New Roman"/>
+        <a:font script="Uigh" typeface="Microsoft Uighur"/>
+        <a:font script="Geor" typeface="Sylfaen"/>
+      </a:majorFont>
+      <a:minorFont>
+        <a:latin typeface="Arial"/>
+        <a:ea typeface=""/>
+        <a:cs typeface=""/>
+        <a:font script="Jpan" typeface="ＭＳ Ｐゴシック"/>
+        <a:font script="Hang" typeface="맑은 고딕"/>
+        <a:font script="Hans" typeface="宋体"/>
+        <a:font script="Hant" typeface="新細明體"/>
+        <a:font script="Arab" typeface="Arial"/>
+        <a:font script="Hebr" typeface="Arial"/>
+        <a:font script="Thai" typeface="Cordia New"/>
+        <a:font script="Ethi" typeface="Nyala"/>
+        <a:font script="Beng" typeface="Vrinda"/>
+        <a:font script="Gujr" typeface="Shruti"/>
+        <a:font script="Khmr" typeface="DaunPenh"/>
+        <a:font script="Knda" typeface="Tunga"/>
+        <a:font script="Guru" typeface="Raavi"/>
+        <a:font script="Cans" typeface="Euphemia"/>
+        <a:font script="Cher" typeface="Plantagenet Cherokee"/>
+        <a:font script="Yiii" typeface="Microsoft Yi Baiti"/>
+        <a:font script="Tibt" typeface="Microsoft Himalaya"/>
+        <a:font script="Thaa" typeface="MV Boli"/>
+        <a:font script="Deva" typeface="Mangal"/>
+        <a:font script="Telu" typeface="Gautami"/>
+        <a:font script="Taml" typeface="Latha"/>
+        <a:font script="Syrc" typeface="Estrangelo Edessa"/>
+        <a:font script="Orya" typeface="Kalinga"/>
+        <a:font script="Mlym" typeface="Kartika"/>
+        <a:font script="Laoo" typeface="DokChampa"/>
+        <a:font script="Sinh" typeface="Iskoola Pota"/>
+        <a:font script="Mong" typeface="Mongolian Baiti"/>
+        <a:font script="Viet" typeface="Arial"/>
+        <a:font script="Uigh" typeface="Microsoft Uighur"/>
+        <a:font script="Geor" typeface="Sylfaen"/>
+      </a:minorFont>
+    </a:fontScheme>
+    <a:fmtScheme name="Office">
+      <a:fillStyleLst>
+        <a:solidFill>
+          <a:schemeClr val="phClr"/>
+        </a:solidFill>
+        <a:gradFill rotWithShape="1">
+          <a:gsLst>
+            <a:gs pos="0">
+              <a:schemeClr val="phClr">
+                <a:tint val="50000"/>
+                <a:satMod val="300000"/>
+              </a:schemeClr>
+            </a:gs>
+            <a:gs pos="35000">
+              <a:schemeClr val="phClr">
+                <a:tint val="37000"/>
+                <a:satMod val="300000"/>
+              </a:schemeClr>
+            </a:gs>
+            <a:gs pos="100000">
+              <a:schemeClr val="phClr">
+                <a:tint val="15000"/>
+                <a:satMod val="350000"/>
+              </a:schemeClr>
+            </a:gs>
+          </a:gsLst>
+          <a:lin ang="16200000" scaled="1"/>
+        </a:gradFill>
+        <a:gradFill rotWithShape="1">
+          <a:gsLst>
+            <a:gs pos="0">
+              <a:schemeClr val="phClr">
+                <a:tint val="100000"/>
+                <a:shade val="100000"/>
+                <a:satMod val="130000"/>
+              </a:schemeClr>
+            </a:gs>
+            <a:gs pos="100000">
+              <a:schemeClr val="phClr">
+                <a:tint val="50000"/>
+                <a:shade val="100000"/>
+                <a:satMod val="350000"/>
+              </a:schemeClr>
+            </a:gs>
+          </a:gsLst>
+          <a:lin ang="16200000" scaled="0"/>
+        </a:gradFill>
+      </a:fillStyleLst>
+      <a:lnStyleLst>
+        <a:ln w="9525" cap="flat" cmpd="sng" algn="ctr">
+          <a:solidFill>
+            <a:schemeClr val="phClr">
+              <a:shade val="95000"/>
+              <a:satMod val="105000"/>
+            </a:schemeClr>
+          </a:solidFill>
+          <a:prstDash val="solid"/>
+        </a:ln>
+        <a:ln w="25400" cap="flat" cmpd="sng" algn="ctr">
+          <a:solidFill>
+            <a:schemeClr val="phClr"/>
+          </a:solidFill>
+          <a:prstDash val="solid"/>
+        </a:ln>
+        <a:ln w="38100" cap="flat" cmpd="sng" algn="ctr">
+          <a:solidFill>
+            <a:schemeClr val="phClr"/>
+          </a:solidFill>
+          <a:prstDash val="solid"/>
+        </a:ln>
+      </a:lnStyleLst>
+      <a:effectStyleLst>
+        <a:effectStyle>
+          <a:effectLst>
+            <a:outerShdw blurRad="40000" dist="20000" dir="5400000" rotWithShape="0">
+              <a:srgbClr val="000000">
+                <a:alpha val="38000"/>
+              </a:srgbClr>
+            </a:outerShdw>
+          </a:effectLst>
+        </a:effectStyle>
+        <a:effectStyle>
+          <a:effectLst>
+            <a:outerShdw blurRad="40000" dist="23000" dir="5400000" rotWithShape="0">
+              <a:srgbClr val="000000">
+                <a:alpha val="35000"/>
+              </a:srgbClr>
+            </a:outerShdw>
+          </a:effectLst>
+        </a:effectStyle>
+        <a:effectStyle>
+          <a:effectLst>
+            <a:outerShdw blurRad="40000" dist="23000" dir="5400000" rotWithShape="0">
+              <a:srgbClr val="000000">
+                <a:alpha val="35000"/>
+              </a:srgbClr>
+            </a:outerShdw>
+          </a:effectLst>
+          <a:scene3d>
+            <a:camera prst="orthographicFront">
+              <a:rot lat="0" lon="0" rev="0"/>
+            </a:camera>
+            <a:lightRig rig="threePt" dir="t">
+              <a:rot lat="0" lon="0" rev="1200000"/>
+            </a:lightRig>
+          </a:scene3d>
+          <a:sp3d>
+            <a:bevelT w="63500" h="25400"/>
+          </a:sp3d>
+        </a:effectStyle>
+      </a:effectStyleLst>
+      <a:bgFillStyleLst>
+        <a:solidFill>
+          <a:schemeClr val="phClr"/>
+        </a:solidFill>
+        <a:gradFill rotWithShape="1">
+          <a:gsLst>
+            <a:gs pos="0">
+              <a:schemeClr val="phClr">
+                <a:tint val="40000"/>
+                <a:satMod val="350000"/>
+              </a:schemeClr>
+            </a:gs>
+            <a:gs pos="40000">
+              <a:schemeClr val="phClr">
+                <a:tint val="45000"/>
+                <a:shade val="99000"/>
+                <a:satMod val="350000"/>
+              </a:schemeClr>
+            </a:gs>
+            <a:gs pos="100000">
+              <a:schemeClr val="phClr">
+                <a:shade val="20000"/>
+                <a:satMod val="255000"/>
+              </a:schemeClr>
+            </a:gs>
+          </a:gsLst>
+          <a:path path="circle">
+            <a:fillToRect l="50000" t="-80000" r="50000" b="180000"/>
+          </a:path>
+        </a:gradFill>
+        <a:gradFill rotWithShape="1">
+          <a:gsLst>
+            <a:gs pos="0">
+              <a:schemeClr val="phClr">
+                <a:tint val="80000"/>
+                <a:satMod val="300000"/>
+              </a:schemeClr>
+            </a:gs>
+            <a:gs pos="100000">
+              <a:schemeClr val="phClr">
+                <a:shade val="30000"/>
+                <a:satMod val="200000"/>
+              </a:schemeClr>
+            </a:gs>
+          </a:gsLst>
+          <a:path path="circle">
+            <a:fillToRect l="50000" t="50000" r="50000" b="50000"/>
+          </a:path>
+        </a:gradFill>
+      </a:bgFillStyleLst>
+    </a:fmtScheme>
+  </a:themeElements>
+</a:theme>
+</file>
+
+<file path=ppt/theme/theme2.xml><?xml version="1.0" encoding="utf-8"?>
 <a:theme xmlns:a="http://schemas.openxmlformats.org/drawingml/2006/main" xmlns:r="http://schemas.openxmlformats.org/officeDocument/2006/relationships">
   <a:themeElements>
     <a:clrScheme name="Default">
@@ -9318,283 +10166,4 @@
     </a:fmtScheme>
   </a:themeElements>
 </a:theme>
-</file>
-
-<file path=ppt/theme/theme2.xml><?xml version="1.0" encoding="utf-8"?>
-<a:theme xmlns:a="http://schemas.openxmlformats.org/drawingml/2006/main" xmlns:r="http://schemas.openxmlformats.org/officeDocument/2006/relationships" name="Material - R01">
-  <a:themeElements>
-    <a:clrScheme name="Material">
-      <a:dk1>
-        <a:srgbClr val="4285F4"/>
-      </a:dk1>
-      <a:lt1>
-        <a:srgbClr val="FFFFFF"/>
-      </a:lt1>
-      <a:dk2>
-        <a:srgbClr val="424242"/>
-      </a:dk2>
-      <a:lt2>
-        <a:srgbClr val="737373"/>
-      </a:lt2>
-      <a:accent1>
-        <a:srgbClr val="0277BD"/>
-      </a:accent1>
-      <a:accent2>
-        <a:srgbClr val="0F9D58"/>
-      </a:accent2>
-      <a:accent3>
-        <a:srgbClr val="DB4437"/>
-      </a:accent3>
-      <a:accent4>
-        <a:srgbClr val="FAFAFA"/>
-      </a:accent4>
-      <a:accent5>
-        <a:srgbClr val="4FC3F7"/>
-      </a:accent5>
-      <a:accent6>
-        <a:srgbClr val="F4B400"/>
-      </a:accent6>
-      <a:hlink>
-        <a:srgbClr val="4FC3F7"/>
-      </a:hlink>
-      <a:folHlink>
-        <a:srgbClr val="4FC3F7"/>
-      </a:folHlink>
-    </a:clrScheme>
-    <a:fontScheme name="Office">
-      <a:majorFont>
-        <a:latin typeface="Arial"/>
-        <a:ea typeface=""/>
-        <a:cs typeface=""/>
-        <a:font script="Jpan" typeface="ＭＳ Ｐゴシック"/>
-        <a:font script="Hang" typeface="맑은 고딕"/>
-        <a:font script="Hans" typeface="宋体"/>
-        <a:font script="Hant" typeface="新細明體"/>
-        <a:font script="Arab" typeface="Times New Roman"/>
-        <a:font script="Hebr" typeface="Times New Roman"/>
-        <a:font script="Thai" typeface="Angsana New"/>
-        <a:font script="Ethi" typeface="Nyala"/>
-        <a:font script="Beng" typeface="Vrinda"/>
-        <a:font script="Gujr" typeface="Shruti"/>
-        <a:font script="Khmr" typeface="MoolBoran"/>
-        <a:font script="Knda" typeface="Tunga"/>
-        <a:font script="Guru" typeface="Raavi"/>
-        <a:font script="Cans" typeface="Euphemia"/>
-        <a:font script="Cher" typeface="Plantagenet Cherokee"/>
-        <a:font script="Yiii" typeface="Microsoft Yi Baiti"/>
-        <a:font script="Tibt" typeface="Microsoft Himalaya"/>
-        <a:font script="Thaa" typeface="MV Boli"/>
-        <a:font script="Deva" typeface="Mangal"/>
-        <a:font script="Telu" typeface="Gautami"/>
-        <a:font script="Taml" typeface="Latha"/>
-        <a:font script="Syrc" typeface="Estrangelo Edessa"/>
-        <a:font script="Orya" typeface="Kalinga"/>
-        <a:font script="Mlym" typeface="Kartika"/>
-        <a:font script="Laoo" typeface="DokChampa"/>
-        <a:font script="Sinh" typeface="Iskoola Pota"/>
-        <a:font script="Mong" typeface="Mongolian Baiti"/>
-        <a:font script="Viet" typeface="Times New Roman"/>
-        <a:font script="Uigh" typeface="Microsoft Uighur"/>
-        <a:font script="Geor" typeface="Sylfaen"/>
-      </a:majorFont>
-      <a:minorFont>
-        <a:latin typeface="Arial"/>
-        <a:ea typeface=""/>
-        <a:cs typeface=""/>
-        <a:font script="Jpan" typeface="ＭＳ Ｐゴシック"/>
-        <a:font script="Hang" typeface="맑은 고딕"/>
-        <a:font script="Hans" typeface="宋体"/>
-        <a:font script="Hant" typeface="新細明體"/>
-        <a:font script="Arab" typeface="Arial"/>
-        <a:font script="Hebr" typeface="Arial"/>
-        <a:font script="Thai" typeface="Cordia New"/>
-        <a:font script="Ethi" typeface="Nyala"/>
-        <a:font script="Beng" typeface="Vrinda"/>
-        <a:font script="Gujr" typeface="Shruti"/>
-        <a:font script="Khmr" typeface="DaunPenh"/>
-        <a:font script="Knda" typeface="Tunga"/>
-        <a:font script="Guru" typeface="Raavi"/>
-        <a:font script="Cans" typeface="Euphemia"/>
-        <a:font script="Cher" typeface="Plantagenet Cherokee"/>
-        <a:font script="Yiii" typeface="Microsoft Yi Baiti"/>
-        <a:font script="Tibt" typeface="Microsoft Himalaya"/>
-        <a:font script="Thaa" typeface="MV Boli"/>
-        <a:font script="Deva" typeface="Mangal"/>
-        <a:font script="Telu" typeface="Gautami"/>
-        <a:font script="Taml" typeface="Latha"/>
-        <a:font script="Syrc" typeface="Estrangelo Edessa"/>
-        <a:font script="Orya" typeface="Kalinga"/>
-        <a:font script="Mlym" typeface="Kartika"/>
-        <a:font script="Laoo" typeface="DokChampa"/>
-        <a:font script="Sinh" typeface="Iskoola Pota"/>
-        <a:font script="Mong" typeface="Mongolian Baiti"/>
-        <a:font script="Viet" typeface="Arial"/>
-        <a:font script="Uigh" typeface="Microsoft Uighur"/>
-        <a:font script="Geor" typeface="Sylfaen"/>
-      </a:minorFont>
-    </a:fontScheme>
-    <a:fmtScheme name="Office">
-      <a:fillStyleLst>
-        <a:solidFill>
-          <a:schemeClr val="phClr"/>
-        </a:solidFill>
-        <a:gradFill rotWithShape="1">
-          <a:gsLst>
-            <a:gs pos="0">
-              <a:schemeClr val="phClr">
-                <a:tint val="50000"/>
-                <a:satMod val="300000"/>
-              </a:schemeClr>
-            </a:gs>
-            <a:gs pos="35000">
-              <a:schemeClr val="phClr">
-                <a:tint val="37000"/>
-                <a:satMod val="300000"/>
-              </a:schemeClr>
-            </a:gs>
-            <a:gs pos="100000">
-              <a:schemeClr val="phClr">
-                <a:tint val="15000"/>
-                <a:satMod val="350000"/>
-              </a:schemeClr>
-            </a:gs>
-          </a:gsLst>
-          <a:lin ang="16200000" scaled="1"/>
-        </a:gradFill>
-        <a:gradFill rotWithShape="1">
-          <a:gsLst>
-            <a:gs pos="0">
-              <a:schemeClr val="phClr">
-                <a:tint val="100000"/>
-                <a:shade val="100000"/>
-                <a:satMod val="130000"/>
-              </a:schemeClr>
-            </a:gs>
-            <a:gs pos="100000">
-              <a:schemeClr val="phClr">
-                <a:tint val="50000"/>
-                <a:shade val="100000"/>
-                <a:satMod val="350000"/>
-              </a:schemeClr>
-            </a:gs>
-          </a:gsLst>
-          <a:lin ang="16200000" scaled="0"/>
-        </a:gradFill>
-      </a:fillStyleLst>
-      <a:lnStyleLst>
-        <a:ln w="9525" cap="flat" cmpd="sng" algn="ctr">
-          <a:solidFill>
-            <a:schemeClr val="phClr">
-              <a:shade val="95000"/>
-              <a:satMod val="105000"/>
-            </a:schemeClr>
-          </a:solidFill>
-          <a:prstDash val="solid"/>
-        </a:ln>
-        <a:ln w="25400" cap="flat" cmpd="sng" algn="ctr">
-          <a:solidFill>
-            <a:schemeClr val="phClr"/>
-          </a:solidFill>
-          <a:prstDash val="solid"/>
-        </a:ln>
-        <a:ln w="38100" cap="flat" cmpd="sng" algn="ctr">
-          <a:solidFill>
-            <a:schemeClr val="phClr"/>
-          </a:solidFill>
-          <a:prstDash val="solid"/>
-        </a:ln>
-      </a:lnStyleLst>
-      <a:effectStyleLst>
-        <a:effectStyle>
-          <a:effectLst>
-            <a:outerShdw blurRad="40000" dist="20000" dir="5400000" rotWithShape="0">
-              <a:srgbClr val="000000">
-                <a:alpha val="38000"/>
-              </a:srgbClr>
-            </a:outerShdw>
-          </a:effectLst>
-        </a:effectStyle>
-        <a:effectStyle>
-          <a:effectLst>
-            <a:outerShdw blurRad="40000" dist="23000" dir="5400000" rotWithShape="0">
-              <a:srgbClr val="000000">
-                <a:alpha val="35000"/>
-              </a:srgbClr>
-            </a:outerShdw>
-          </a:effectLst>
-        </a:effectStyle>
-        <a:effectStyle>
-          <a:effectLst>
-            <a:outerShdw blurRad="40000" dist="23000" dir="5400000" rotWithShape="0">
-              <a:srgbClr val="000000">
-                <a:alpha val="35000"/>
-              </a:srgbClr>
-            </a:outerShdw>
-          </a:effectLst>
-          <a:scene3d>
-            <a:camera prst="orthographicFront">
-              <a:rot lat="0" lon="0" rev="0"/>
-            </a:camera>
-            <a:lightRig rig="threePt" dir="t">
-              <a:rot lat="0" lon="0" rev="1200000"/>
-            </a:lightRig>
-          </a:scene3d>
-          <a:sp3d>
-            <a:bevelT w="63500" h="25400"/>
-          </a:sp3d>
-        </a:effectStyle>
-      </a:effectStyleLst>
-      <a:bgFillStyleLst>
-        <a:solidFill>
-          <a:schemeClr val="phClr"/>
-        </a:solidFill>
-        <a:gradFill rotWithShape="1">
-          <a:gsLst>
-            <a:gs pos="0">
-              <a:schemeClr val="phClr">
-                <a:tint val="40000"/>
-                <a:satMod val="350000"/>
-              </a:schemeClr>
-            </a:gs>
-            <a:gs pos="40000">
-              <a:schemeClr val="phClr">
-                <a:tint val="45000"/>
-                <a:shade val="99000"/>
-                <a:satMod val="350000"/>
-              </a:schemeClr>
-            </a:gs>
-            <a:gs pos="100000">
-              <a:schemeClr val="phClr">
-                <a:shade val="20000"/>
-                <a:satMod val="255000"/>
-              </a:schemeClr>
-            </a:gs>
-          </a:gsLst>
-          <a:path path="circle">
-            <a:fillToRect l="50000" t="-80000" r="50000" b="180000"/>
-          </a:path>
-        </a:gradFill>
-        <a:gradFill rotWithShape="1">
-          <a:gsLst>
-            <a:gs pos="0">
-              <a:schemeClr val="phClr">
-                <a:tint val="80000"/>
-                <a:satMod val="300000"/>
-              </a:schemeClr>
-            </a:gs>
-            <a:gs pos="100000">
-              <a:schemeClr val="phClr">
-                <a:shade val="30000"/>
-                <a:satMod val="200000"/>
-              </a:schemeClr>
-            </a:gs>
-          </a:gsLst>
-          <a:path path="circle">
-            <a:fillToRect l="50000" t="50000" r="50000" b="50000"/>
-          </a:path>
-        </a:gradFill>
-      </a:bgFillStyleLst>
-    </a:fmtScheme>
-  </a:themeElements>
-</a:theme>
 </file>